--- a/Documentation/mindmap_visual_presentation.pptx
+++ b/Documentation/mindmap_visual_presentation.pptx
@@ -13,6 +13,7 @@
     <p:sldId id="266" r:id="rId7"/>
     <p:sldId id="268" r:id="rId8"/>
     <p:sldId id="267" r:id="rId9"/>
+    <p:sldId id="269" r:id="rId10"/>
   </p:sldIdLst>
   <p:sldSz cx="12192000" cy="6858000"/>
   <p:notesSz cx="6858000" cy="9144000"/>
@@ -309,7 +310,7 @@
           <a:p>
             <a:fld id="{5BCAD085-E8A6-8845-BD4E-CB4CCA059FC4}" type="datetimeFigureOut">
               <a:rPr lang="en-US" smtClean="0"/>
-              <a:t>3/23/2026</a:t>
+              <a:t>3/24/2026</a:t>
             </a:fld>
             <a:endParaRPr lang="en-US"/>
           </a:p>
@@ -477,7 +478,7 @@
           <a:p>
             <a:fld id="{5BCAD085-E8A6-8845-BD4E-CB4CCA059FC4}" type="datetimeFigureOut">
               <a:rPr lang="en-US" smtClean="0"/>
-              <a:t>3/23/2026</a:t>
+              <a:t>3/24/2026</a:t>
             </a:fld>
             <a:endParaRPr lang="en-US"/>
           </a:p>
@@ -655,7 +656,7 @@
           <a:p>
             <a:fld id="{5BCAD085-E8A6-8845-BD4E-CB4CCA059FC4}" type="datetimeFigureOut">
               <a:rPr lang="en-US" smtClean="0"/>
-              <a:t>3/23/2026</a:t>
+              <a:t>3/24/2026</a:t>
             </a:fld>
             <a:endParaRPr lang="en-US"/>
           </a:p>
@@ -823,7 +824,7 @@
           <a:p>
             <a:fld id="{5BCAD085-E8A6-8845-BD4E-CB4CCA059FC4}" type="datetimeFigureOut">
               <a:rPr lang="en-US" smtClean="0"/>
-              <a:t>3/23/2026</a:t>
+              <a:t>3/24/2026</a:t>
             </a:fld>
             <a:endParaRPr lang="en-US"/>
           </a:p>
@@ -1068,7 +1069,7 @@
           <a:p>
             <a:fld id="{5BCAD085-E8A6-8845-BD4E-CB4CCA059FC4}" type="datetimeFigureOut">
               <a:rPr lang="en-US" smtClean="0"/>
-              <a:t>3/23/2026</a:t>
+              <a:t>3/24/2026</a:t>
             </a:fld>
             <a:endParaRPr lang="en-US"/>
           </a:p>
@@ -1353,7 +1354,7 @@
           <a:p>
             <a:fld id="{5BCAD085-E8A6-8845-BD4E-CB4CCA059FC4}" type="datetimeFigureOut">
               <a:rPr lang="en-US" smtClean="0"/>
-              <a:t>3/23/2026</a:t>
+              <a:t>3/24/2026</a:t>
             </a:fld>
             <a:endParaRPr lang="en-US"/>
           </a:p>
@@ -1772,7 +1773,7 @@
           <a:p>
             <a:fld id="{5BCAD085-E8A6-8845-BD4E-CB4CCA059FC4}" type="datetimeFigureOut">
               <a:rPr lang="en-US" smtClean="0"/>
-              <a:t>3/23/2026</a:t>
+              <a:t>3/24/2026</a:t>
             </a:fld>
             <a:endParaRPr lang="en-US"/>
           </a:p>
@@ -1889,7 +1890,7 @@
           <a:p>
             <a:fld id="{5BCAD085-E8A6-8845-BD4E-CB4CCA059FC4}" type="datetimeFigureOut">
               <a:rPr lang="en-US" smtClean="0"/>
-              <a:t>3/23/2026</a:t>
+              <a:t>3/24/2026</a:t>
             </a:fld>
             <a:endParaRPr lang="en-US"/>
           </a:p>
@@ -1984,7 +1985,7 @@
           <a:p>
             <a:fld id="{5BCAD085-E8A6-8845-BD4E-CB4CCA059FC4}" type="datetimeFigureOut">
               <a:rPr lang="en-US" smtClean="0"/>
-              <a:t>3/23/2026</a:t>
+              <a:t>3/24/2026</a:t>
             </a:fld>
             <a:endParaRPr lang="en-US"/>
           </a:p>
@@ -2259,7 +2260,7 @@
           <a:p>
             <a:fld id="{5BCAD085-E8A6-8845-BD4E-CB4CCA059FC4}" type="datetimeFigureOut">
               <a:rPr lang="en-US" smtClean="0"/>
-              <a:t>3/23/2026</a:t>
+              <a:t>3/24/2026</a:t>
             </a:fld>
             <a:endParaRPr lang="en-US"/>
           </a:p>
@@ -2511,7 +2512,7 @@
           <a:p>
             <a:fld id="{5BCAD085-E8A6-8845-BD4E-CB4CCA059FC4}" type="datetimeFigureOut">
               <a:rPr lang="en-US" smtClean="0"/>
-              <a:t>3/23/2026</a:t>
+              <a:t>3/24/2026</a:t>
             </a:fld>
             <a:endParaRPr lang="en-US"/>
           </a:p>
@@ -2722,7 +2723,7 @@
           <a:p>
             <a:fld id="{5BCAD085-E8A6-8845-BD4E-CB4CCA059FC4}" type="datetimeFigureOut">
               <a:rPr lang="en-US" smtClean="0"/>
-              <a:t>3/23/2026</a:t>
+              <a:t>3/24/2026</a:t>
             </a:fld>
             <a:endParaRPr lang="en-US"/>
           </a:p>
@@ -9240,7 +9241,7 @@
         </p:nvSpPr>
         <p:spPr>
           <a:xfrm>
-            <a:off x="4972678" y="3586318"/>
+            <a:off x="11263365" y="3586318"/>
             <a:ext cx="164592" cy="1234440"/>
           </a:xfrm>
           <a:prstGeom prst="rect">
@@ -9290,7 +9291,7 @@
         </p:nvSpPr>
         <p:spPr>
           <a:xfrm>
-            <a:off x="5292718" y="3860638"/>
+            <a:off x="10486358" y="3938130"/>
             <a:ext cx="512064" cy="512064"/>
           </a:xfrm>
           <a:prstGeom prst="ellipse">
@@ -9340,7 +9341,7 @@
         </p:nvSpPr>
         <p:spPr>
           <a:xfrm>
-            <a:off x="5357031" y="3924646"/>
+            <a:off x="10550671" y="4002138"/>
             <a:ext cx="383439" cy="646331"/>
           </a:xfrm>
           <a:prstGeom prst="rect">
@@ -9388,7 +9389,7 @@
         </p:nvSpPr>
         <p:spPr>
           <a:xfrm>
-            <a:off x="5887077" y="3787486"/>
+            <a:off x="5189648" y="3769748"/>
             <a:ext cx="5361023" cy="923330"/>
           </a:xfrm>
           <a:prstGeom prst="rect">
@@ -11076,7 +11077,7 @@
         </p:nvSpPr>
         <p:spPr>
           <a:xfrm>
-            <a:off x="6206637" y="3559278"/>
+            <a:off x="11407009" y="3559278"/>
             <a:ext cx="164592" cy="792407"/>
           </a:xfrm>
           <a:prstGeom prst="rect">
@@ -11126,7 +11127,7 @@
         </p:nvSpPr>
         <p:spPr>
           <a:xfrm>
-            <a:off x="6526677" y="3686111"/>
+            <a:off x="10781681" y="3671117"/>
             <a:ext cx="512064" cy="512064"/>
           </a:xfrm>
           <a:prstGeom prst="ellipse">
@@ -11176,7 +11177,7 @@
         </p:nvSpPr>
         <p:spPr>
           <a:xfrm>
-            <a:off x="6526677" y="3750119"/>
+            <a:off x="10781681" y="3735125"/>
             <a:ext cx="512064" cy="274320"/>
           </a:xfrm>
           <a:prstGeom prst="rect">
@@ -11216,7 +11217,7 @@
         </p:nvSpPr>
         <p:spPr>
           <a:xfrm>
-            <a:off x="7194189" y="3700466"/>
+            <a:off x="6462570" y="3691340"/>
             <a:ext cx="4063179" cy="584775"/>
           </a:xfrm>
           <a:prstGeom prst="rect">
@@ -11304,7 +11305,7 @@
         </p:nvSpPr>
         <p:spPr>
           <a:xfrm>
-            <a:off x="6221384" y="5638804"/>
+            <a:off x="11380701" y="5638804"/>
             <a:ext cx="164592" cy="792407"/>
           </a:xfrm>
           <a:prstGeom prst="rect">
@@ -11354,7 +11355,7 @@
         </p:nvSpPr>
         <p:spPr>
           <a:xfrm>
-            <a:off x="6541424" y="5765637"/>
+            <a:off x="10737042" y="5803629"/>
             <a:ext cx="512064" cy="512064"/>
           </a:xfrm>
           <a:prstGeom prst="ellipse">
@@ -11404,7 +11405,7 @@
         </p:nvSpPr>
         <p:spPr>
           <a:xfrm>
-            <a:off x="6541424" y="5829645"/>
+            <a:off x="10737042" y="5867637"/>
             <a:ext cx="512064" cy="274320"/>
           </a:xfrm>
           <a:prstGeom prst="rect">
@@ -11444,7 +11445,7 @@
         </p:nvSpPr>
         <p:spPr>
           <a:xfrm>
-            <a:off x="7208936" y="5779992"/>
+            <a:off x="6416013" y="5770040"/>
             <a:ext cx="4063179" cy="584775"/>
           </a:xfrm>
           <a:prstGeom prst="rect">
@@ -12578,7 +12579,7 @@
         </p:nvSpPr>
         <p:spPr>
           <a:xfrm>
-            <a:off x="6206637" y="2792360"/>
+            <a:off x="11354731" y="2792360"/>
             <a:ext cx="164592" cy="1554875"/>
           </a:xfrm>
           <a:prstGeom prst="rect">
@@ -12628,7 +12629,7 @@
         </p:nvSpPr>
         <p:spPr>
           <a:xfrm>
-            <a:off x="6526677" y="3274424"/>
+            <a:off x="10499510" y="3274424"/>
             <a:ext cx="512064" cy="512064"/>
           </a:xfrm>
           <a:prstGeom prst="ellipse">
@@ -12678,7 +12679,7 @@
         </p:nvSpPr>
         <p:spPr>
           <a:xfrm>
-            <a:off x="6526677" y="3338432"/>
+            <a:off x="10499510" y="3338432"/>
             <a:ext cx="512064" cy="274320"/>
           </a:xfrm>
           <a:prstGeom prst="rect">
@@ -12718,7 +12719,7 @@
         </p:nvSpPr>
         <p:spPr>
           <a:xfrm>
-            <a:off x="7194189" y="3114064"/>
+            <a:off x="6621923" y="3154298"/>
             <a:ext cx="4063179" cy="830997"/>
           </a:xfrm>
           <a:prstGeom prst="rect">
@@ -12898,7 +12899,7 @@
           <a:p>
             <a:r>
               <a:rPr lang="en-US" sz="5400" b="1" dirty="0"/>
-              <a:t>Conclusion &amp; Q&amp;A</a:t>
+              <a:t>Conclusion</a:t>
             </a:r>
           </a:p>
         </p:txBody>
@@ -13826,7 +13827,7 @@
         </p:nvSpPr>
         <p:spPr>
           <a:xfrm>
-            <a:off x="6340332" y="2158526"/>
+            <a:off x="656304" y="4675584"/>
             <a:ext cx="5302044" cy="1234440"/>
           </a:xfrm>
           <a:prstGeom prst="roundRect">
@@ -13878,7 +13879,7 @@
         </p:nvSpPr>
         <p:spPr>
           <a:xfrm>
-            <a:off x="6340332" y="2158526"/>
+            <a:off x="656304" y="4675584"/>
             <a:ext cx="164592" cy="1234440"/>
           </a:xfrm>
           <a:prstGeom prst="rect">
@@ -13928,7 +13929,7 @@
         </p:nvSpPr>
         <p:spPr>
           <a:xfrm>
-            <a:off x="6660372" y="2432846"/>
+            <a:off x="976344" y="4949904"/>
             <a:ext cx="512064" cy="512064"/>
           </a:xfrm>
           <a:prstGeom prst="ellipse">
@@ -13978,7 +13979,7 @@
         </p:nvSpPr>
         <p:spPr>
           <a:xfrm>
-            <a:off x="6660372" y="2496854"/>
+            <a:off x="976344" y="5013912"/>
             <a:ext cx="512064" cy="274320"/>
           </a:xfrm>
           <a:prstGeom prst="rect">
@@ -14018,8 +14019,8 @@
         </p:nvSpPr>
         <p:spPr>
           <a:xfrm>
-            <a:off x="7254732" y="2359694"/>
-            <a:ext cx="4269657" cy="914400"/>
+            <a:off x="1570704" y="4876752"/>
+            <a:ext cx="4269657" cy="907941"/>
           </a:xfrm>
           <a:prstGeom prst="rect">
             <a:avLst/>
@@ -14054,8 +14055,903 @@
             </a:pPr>
             <a:r>
               <a:rPr lang="en-US" noProof="0" dirty="0"/>
-              <a:t>It combines RAG, fine-tuning, and hybrid scoring into one practical platform.</a:t>
+              <a:t>It combines RAG, fine-tuning, and hybrid scoring into one practical platform and outperforms Llama3.2.</a:t>
             </a:r>
+          </a:p>
+        </p:txBody>
+      </p:sp>
+      <p:pic>
+        <p:nvPicPr>
+          <p:cNvPr id="1026" name="Picture 2">
+            <a:extLst>
+              <a:ext uri="{FF2B5EF4-FFF2-40B4-BE49-F238E27FC236}">
+                <a16:creationId xmlns:a16="http://schemas.microsoft.com/office/drawing/2014/main" id="{1A0390AF-D90D-A6E6-D599-24828C2B5AA3}"/>
+              </a:ext>
+            </a:extLst>
+          </p:cNvPr>
+          <p:cNvPicPr>
+            <a:picLocks noChangeAspect="1" noChangeArrowheads="1"/>
+          </p:cNvPicPr>
+          <p:nvPr/>
+        </p:nvPicPr>
+        <p:blipFill>
+          <a:blip r:embed="rId2">
+            <a:extLst>
+              <a:ext uri="{28A0092B-C50C-407E-A947-70E740481C1C}">
+                <a14:useLocalDpi xmlns:a14="http://schemas.microsoft.com/office/drawing/2010/main" val="0"/>
+              </a:ext>
+            </a:extLst>
+          </a:blip>
+          <a:srcRect/>
+          <a:stretch>
+            <a:fillRect/>
+          </a:stretch>
+        </p:blipFill>
+        <p:spPr bwMode="auto">
+          <a:xfrm>
+            <a:off x="7295535" y="4198373"/>
+            <a:ext cx="3228116" cy="2421087"/>
+          </a:xfrm>
+          <a:prstGeom prst="rect">
+            <a:avLst/>
+          </a:prstGeom>
+          <a:noFill/>
+          <a:extLst>
+            <a:ext uri="{909E8E84-426E-40DD-AFC4-6F175D3DCCD1}">
+              <a14:hiddenFill xmlns:a14="http://schemas.microsoft.com/office/drawing/2010/main">
+                <a:solidFill>
+                  <a:srgbClr val="FFFFFF"/>
+                </a:solidFill>
+              </a14:hiddenFill>
+            </a:ext>
+          </a:extLst>
+        </p:spPr>
+      </p:pic>
+      <p:pic>
+        <p:nvPicPr>
+          <p:cNvPr id="1028" name="Picture 4">
+            <a:extLst>
+              <a:ext uri="{FF2B5EF4-FFF2-40B4-BE49-F238E27FC236}">
+                <a16:creationId xmlns:a16="http://schemas.microsoft.com/office/drawing/2014/main" id="{51D8B266-E104-3110-316A-CA9BD3CDC03E}"/>
+              </a:ext>
+            </a:extLst>
+          </p:cNvPr>
+          <p:cNvPicPr>
+            <a:picLocks noChangeAspect="1" noChangeArrowheads="1"/>
+          </p:cNvPicPr>
+          <p:nvPr/>
+        </p:nvPicPr>
+        <p:blipFill>
+          <a:blip r:embed="rId2">
+            <a:extLst>
+              <a:ext uri="{28A0092B-C50C-407E-A947-70E740481C1C}">
+                <a14:useLocalDpi xmlns:a14="http://schemas.microsoft.com/office/drawing/2010/main" val="0"/>
+              </a:ext>
+            </a:extLst>
+          </a:blip>
+          <a:srcRect/>
+          <a:stretch>
+            <a:fillRect/>
+          </a:stretch>
+        </p:blipFill>
+        <p:spPr bwMode="auto">
+          <a:xfrm>
+            <a:off x="7295533" y="1857828"/>
+            <a:ext cx="3228118" cy="2421088"/>
+          </a:xfrm>
+          <a:prstGeom prst="rect">
+            <a:avLst/>
+          </a:prstGeom>
+          <a:noFill/>
+          <a:extLst>
+            <a:ext uri="{909E8E84-426E-40DD-AFC4-6F175D3DCCD1}">
+              <a14:hiddenFill xmlns:a14="http://schemas.microsoft.com/office/drawing/2010/main">
+                <a:solidFill>
+                  <a:srgbClr val="FFFFFF"/>
+                </a:solidFill>
+              </a14:hiddenFill>
+            </a:ext>
+          </a:extLst>
+        </p:spPr>
+      </p:pic>
+    </p:spTree>
+    <p:extLst>
+      <p:ext uri="{BB962C8B-B14F-4D97-AF65-F5344CB8AC3E}">
+        <p14:creationId xmlns:p14="http://schemas.microsoft.com/office/powerpoint/2010/main" val="1798603094"/>
+      </p:ext>
+    </p:extLst>
+  </p:cSld>
+  <p:clrMapOvr>
+    <a:masterClrMapping/>
+  </p:clrMapOvr>
+</p:sld>
+</file>
+
+<file path=ppt/slides/slide9.xml><?xml version="1.0" encoding="utf-8"?>
+<p:sld xmlns:a="http://schemas.openxmlformats.org/drawingml/2006/main" xmlns:r="http://schemas.openxmlformats.org/officeDocument/2006/relationships" xmlns:p="http://schemas.openxmlformats.org/presentationml/2006/main">
+  <p:cSld>
+    <p:bg>
+      <p:bgPr>
+        <a:solidFill>
+          <a:schemeClr val="bg1"/>
+        </a:solidFill>
+        <a:effectLst/>
+      </p:bgPr>
+    </p:bg>
+    <p:spTree>
+      <p:nvGrpSpPr>
+        <p:cNvPr id="1" name="">
+          <a:extLst>
+            <a:ext uri="{FF2B5EF4-FFF2-40B4-BE49-F238E27FC236}">
+              <a16:creationId xmlns:a16="http://schemas.microsoft.com/office/drawing/2014/main" id="{20DB2383-BDDE-4CE8-C928-DCB20F145746}"/>
+            </a:ext>
+          </a:extLst>
+        </p:cNvPr>
+        <p:cNvGrpSpPr/>
+        <p:nvPr/>
+      </p:nvGrpSpPr>
+      <p:grpSpPr>
+        <a:xfrm>
+          <a:off x="0" y="0"/>
+          <a:ext cx="0" cy="0"/>
+          <a:chOff x="0" y="0"/>
+          <a:chExt cx="0" cy="0"/>
+        </a:xfrm>
+      </p:grpSpPr>
+      <p:sp useBgFill="1">
+        <p:nvSpPr>
+          <p:cNvPr id="1033" name="Rectangle 1032">
+            <a:extLst>
+              <a:ext uri="{FF2B5EF4-FFF2-40B4-BE49-F238E27FC236}">
+                <a16:creationId xmlns:a16="http://schemas.microsoft.com/office/drawing/2014/main" id="{CCFF0D97-C19B-195B-7017-8EFA79036304}"/>
+              </a:ext>
+              <a:ext uri="{C183D7F6-B498-43B3-948B-1728B52AA6E4}">
+                <adec:decorative xmlns:adec="http://schemas.microsoft.com/office/drawing/2017/decorative" val="1"/>
+              </a:ext>
+            </a:extLst>
+          </p:cNvPr>
+          <p:cNvSpPr>
+            <a:spLocks noGrp="1" noRot="1" noChangeAspect="1" noMove="1" noResize="1" noEditPoints="1" noAdjustHandles="1" noChangeArrowheads="1" noChangeShapeType="1" noTextEdit="1"/>
+          </p:cNvSpPr>
+          <p:nvPr>
+            <p:extLst>
+              <p:ext uri="{386F3935-93C4-4BCD-93E2-E3B085C9AB24}">
+                <p16:designElem xmlns:p16="http://schemas.microsoft.com/office/powerpoint/2015/main" val="1"/>
+              </p:ext>
+            </p:extLst>
+          </p:nvPr>
+        </p:nvSpPr>
+        <p:spPr>
+          <a:xfrm>
+            <a:off x="0" y="0"/>
+            <a:ext cx="12188952" cy="6858000"/>
+          </a:xfrm>
+          <a:prstGeom prst="rect">
+            <a:avLst/>
+          </a:prstGeom>
+          <a:ln>
+            <a:noFill/>
+          </a:ln>
+        </p:spPr>
+        <p:style>
+          <a:lnRef idx="2">
+            <a:schemeClr val="accent1">
+              <a:shade val="50000"/>
+            </a:schemeClr>
+          </a:lnRef>
+          <a:fillRef idx="1">
+            <a:schemeClr val="accent1"/>
+          </a:fillRef>
+          <a:effectRef idx="0">
+            <a:schemeClr val="accent1"/>
+          </a:effectRef>
+          <a:fontRef idx="minor">
+            <a:schemeClr val="lt1"/>
+          </a:fontRef>
+        </p:style>
+        <p:txBody>
+          <a:bodyPr rtlCol="0" anchor="ctr"/>
+          <a:lstStyle/>
+          <a:p>
+            <a:pPr algn="ctr"/>
+            <a:endParaRPr lang="en-US" noProof="0" dirty="0"/>
+          </a:p>
+        </p:txBody>
+      </p:sp>
+      <p:sp>
+        <p:nvSpPr>
+          <p:cNvPr id="2" name="Title 1">
+            <a:extLst>
+              <a:ext uri="{FF2B5EF4-FFF2-40B4-BE49-F238E27FC236}">
+                <a16:creationId xmlns:a16="http://schemas.microsoft.com/office/drawing/2014/main" id="{AB767380-2498-5DE1-DC29-CDAC70D47258}"/>
+              </a:ext>
+            </a:extLst>
+          </p:cNvPr>
+          <p:cNvSpPr>
+            <a:spLocks noGrp="1"/>
+          </p:cNvSpPr>
+          <p:nvPr>
+            <p:ph type="title"/>
+          </p:nvPr>
+        </p:nvSpPr>
+        <p:spPr>
+          <a:xfrm>
+            <a:off x="572493" y="238539"/>
+            <a:ext cx="11018520" cy="1434415"/>
+          </a:xfrm>
+        </p:spPr>
+        <p:txBody>
+          <a:bodyPr anchor="b">
+            <a:normAutofit/>
+          </a:bodyPr>
+          <a:lstStyle/>
+          <a:p>
+            <a:r>
+              <a:rPr lang="en-US" sz="5400" b="1" dirty="0"/>
+              <a:t>Q&amp;A</a:t>
+            </a:r>
+          </a:p>
+        </p:txBody>
+      </p:sp>
+      <p:sp>
+        <p:nvSpPr>
+          <p:cNvPr id="1035" name="sketchy line">
+            <a:extLst>
+              <a:ext uri="{FF2B5EF4-FFF2-40B4-BE49-F238E27FC236}">
+                <a16:creationId xmlns:a16="http://schemas.microsoft.com/office/drawing/2014/main" id="{229B4F8E-89E3-41AB-FE50-D8712E3B3A4A}"/>
+              </a:ext>
+              <a:ext uri="{C183D7F6-B498-43B3-948B-1728B52AA6E4}">
+                <adec:decorative xmlns:adec="http://schemas.microsoft.com/office/drawing/2017/decorative" val="1"/>
+              </a:ext>
+            </a:extLst>
+          </p:cNvPr>
+          <p:cNvSpPr>
+            <a:spLocks noGrp="1" noRot="1" noChangeAspect="1" noMove="1" noResize="1" noEditPoints="1" noAdjustHandles="1" noChangeArrowheads="1" noChangeShapeType="1" noTextEdit="1"/>
+          </p:cNvSpPr>
+          <p:nvPr>
+            <p:extLst>
+              <p:ext uri="{386F3935-93C4-4BCD-93E2-E3B085C9AB24}">
+                <p16:designElem xmlns:p16="http://schemas.microsoft.com/office/powerpoint/2015/main" val="1"/>
+              </p:ext>
+            </p:extLst>
+          </p:nvPr>
+        </p:nvSpPr>
+        <p:spPr>
+          <a:xfrm>
+            <a:off x="572493" y="1681544"/>
+            <a:ext cx="10972800" cy="18288"/>
+          </a:xfrm>
+          <a:custGeom>
+            <a:avLst/>
+            <a:gdLst>
+              <a:gd name="csX0" fmla="*/ 0 w 10972800"/>
+              <a:gd name="csY0" fmla="*/ 0 h 18288"/>
+              <a:gd name="csX1" fmla="*/ 356616 w 10972800"/>
+              <a:gd name="csY1" fmla="*/ 0 h 18288"/>
+              <a:gd name="csX2" fmla="*/ 1042416 w 10972800"/>
+              <a:gd name="csY2" fmla="*/ 0 h 18288"/>
+              <a:gd name="csX3" fmla="*/ 1947672 w 10972800"/>
+              <a:gd name="csY3" fmla="*/ 0 h 18288"/>
+              <a:gd name="csX4" fmla="*/ 2633472 w 10972800"/>
+              <a:gd name="csY4" fmla="*/ 0 h 18288"/>
+              <a:gd name="csX5" fmla="*/ 2990088 w 10972800"/>
+              <a:gd name="csY5" fmla="*/ 0 h 18288"/>
+              <a:gd name="csX6" fmla="*/ 3456432 w 10972800"/>
+              <a:gd name="csY6" fmla="*/ 0 h 18288"/>
+              <a:gd name="csX7" fmla="*/ 4361688 w 10972800"/>
+              <a:gd name="csY7" fmla="*/ 0 h 18288"/>
+              <a:gd name="csX8" fmla="*/ 5266944 w 10972800"/>
+              <a:gd name="csY8" fmla="*/ 0 h 18288"/>
+              <a:gd name="csX9" fmla="*/ 6172200 w 10972800"/>
+              <a:gd name="csY9" fmla="*/ 0 h 18288"/>
+              <a:gd name="csX10" fmla="*/ 6528816 w 10972800"/>
+              <a:gd name="csY10" fmla="*/ 0 h 18288"/>
+              <a:gd name="csX11" fmla="*/ 7214616 w 10972800"/>
+              <a:gd name="csY11" fmla="*/ 0 h 18288"/>
+              <a:gd name="csX12" fmla="*/ 7790688 w 10972800"/>
+              <a:gd name="csY12" fmla="*/ 0 h 18288"/>
+              <a:gd name="csX13" fmla="*/ 8147304 w 10972800"/>
+              <a:gd name="csY13" fmla="*/ 0 h 18288"/>
+              <a:gd name="csX14" fmla="*/ 9052560 w 10972800"/>
+              <a:gd name="csY14" fmla="*/ 0 h 18288"/>
+              <a:gd name="csX15" fmla="*/ 9409176 w 10972800"/>
+              <a:gd name="csY15" fmla="*/ 0 h 18288"/>
+              <a:gd name="csX16" fmla="*/ 9765792 w 10972800"/>
+              <a:gd name="csY16" fmla="*/ 0 h 18288"/>
+              <a:gd name="csX17" fmla="*/ 10341864 w 10972800"/>
+              <a:gd name="csY17" fmla="*/ 0 h 18288"/>
+              <a:gd name="csX18" fmla="*/ 10972800 w 10972800"/>
+              <a:gd name="csY18" fmla="*/ 0 h 18288"/>
+              <a:gd name="csX19" fmla="*/ 10972800 w 10972800"/>
+              <a:gd name="csY19" fmla="*/ 18288 h 18288"/>
+              <a:gd name="csX20" fmla="*/ 10177272 w 10972800"/>
+              <a:gd name="csY20" fmla="*/ 18288 h 18288"/>
+              <a:gd name="csX21" fmla="*/ 9820656 w 10972800"/>
+              <a:gd name="csY21" fmla="*/ 18288 h 18288"/>
+              <a:gd name="csX22" fmla="*/ 9464040 w 10972800"/>
+              <a:gd name="csY22" fmla="*/ 18288 h 18288"/>
+              <a:gd name="csX23" fmla="*/ 8778240 w 10972800"/>
+              <a:gd name="csY23" fmla="*/ 18288 h 18288"/>
+              <a:gd name="csX24" fmla="*/ 8421624 w 10972800"/>
+              <a:gd name="csY24" fmla="*/ 18288 h 18288"/>
+              <a:gd name="csX25" fmla="*/ 7735824 w 10972800"/>
+              <a:gd name="csY25" fmla="*/ 18288 h 18288"/>
+              <a:gd name="csX26" fmla="*/ 6940296 w 10972800"/>
+              <a:gd name="csY26" fmla="*/ 18288 h 18288"/>
+              <a:gd name="csX27" fmla="*/ 6254496 w 10972800"/>
+              <a:gd name="csY27" fmla="*/ 18288 h 18288"/>
+              <a:gd name="csX28" fmla="*/ 5458968 w 10972800"/>
+              <a:gd name="csY28" fmla="*/ 18288 h 18288"/>
+              <a:gd name="csX29" fmla="*/ 4663440 w 10972800"/>
+              <a:gd name="csY29" fmla="*/ 18288 h 18288"/>
+              <a:gd name="csX30" fmla="*/ 4306824 w 10972800"/>
+              <a:gd name="csY30" fmla="*/ 18288 h 18288"/>
+              <a:gd name="csX31" fmla="*/ 3840480 w 10972800"/>
+              <a:gd name="csY31" fmla="*/ 18288 h 18288"/>
+              <a:gd name="csX32" fmla="*/ 3264408 w 10972800"/>
+              <a:gd name="csY32" fmla="*/ 18288 h 18288"/>
+              <a:gd name="csX33" fmla="*/ 2578608 w 10972800"/>
+              <a:gd name="csY33" fmla="*/ 18288 h 18288"/>
+              <a:gd name="csX34" fmla="*/ 1673352 w 10972800"/>
+              <a:gd name="csY34" fmla="*/ 18288 h 18288"/>
+              <a:gd name="csX35" fmla="*/ 877824 w 10972800"/>
+              <a:gd name="csY35" fmla="*/ 18288 h 18288"/>
+              <a:gd name="csX36" fmla="*/ 0 w 10972800"/>
+              <a:gd name="csY36" fmla="*/ 18288 h 18288"/>
+              <a:gd name="csX37" fmla="*/ 0 w 10972800"/>
+              <a:gd name="csY37" fmla="*/ 0 h 18288"/>
+            </a:gdLst>
+            <a:ahLst/>
+            <a:cxnLst>
+              <a:cxn ang="0">
+                <a:pos x="csX0" y="csY0"/>
+              </a:cxn>
+              <a:cxn ang="0">
+                <a:pos x="csX1" y="csY1"/>
+              </a:cxn>
+              <a:cxn ang="0">
+                <a:pos x="csX2" y="csY2"/>
+              </a:cxn>
+              <a:cxn ang="0">
+                <a:pos x="csX3" y="csY3"/>
+              </a:cxn>
+              <a:cxn ang="0">
+                <a:pos x="csX4" y="csY4"/>
+              </a:cxn>
+              <a:cxn ang="0">
+                <a:pos x="csX5" y="csY5"/>
+              </a:cxn>
+              <a:cxn ang="0">
+                <a:pos x="csX6" y="csY6"/>
+              </a:cxn>
+              <a:cxn ang="0">
+                <a:pos x="csX7" y="csY7"/>
+              </a:cxn>
+              <a:cxn ang="0">
+                <a:pos x="csX8" y="csY8"/>
+              </a:cxn>
+              <a:cxn ang="0">
+                <a:pos x="csX9" y="csY9"/>
+              </a:cxn>
+              <a:cxn ang="0">
+                <a:pos x="csX10" y="csY10"/>
+              </a:cxn>
+              <a:cxn ang="0">
+                <a:pos x="csX11" y="csY11"/>
+              </a:cxn>
+              <a:cxn ang="0">
+                <a:pos x="csX12" y="csY12"/>
+              </a:cxn>
+              <a:cxn ang="0">
+                <a:pos x="csX13" y="csY13"/>
+              </a:cxn>
+              <a:cxn ang="0">
+                <a:pos x="csX14" y="csY14"/>
+              </a:cxn>
+              <a:cxn ang="0">
+                <a:pos x="csX15" y="csY15"/>
+              </a:cxn>
+              <a:cxn ang="0">
+                <a:pos x="csX16" y="csY16"/>
+              </a:cxn>
+              <a:cxn ang="0">
+                <a:pos x="csX17" y="csY17"/>
+              </a:cxn>
+              <a:cxn ang="0">
+                <a:pos x="csX18" y="csY18"/>
+              </a:cxn>
+              <a:cxn ang="0">
+                <a:pos x="csX19" y="csY19"/>
+              </a:cxn>
+              <a:cxn ang="0">
+                <a:pos x="csX20" y="csY20"/>
+              </a:cxn>
+              <a:cxn ang="0">
+                <a:pos x="csX21" y="csY21"/>
+              </a:cxn>
+              <a:cxn ang="0">
+                <a:pos x="csX22" y="csY22"/>
+              </a:cxn>
+              <a:cxn ang="0">
+                <a:pos x="csX23" y="csY23"/>
+              </a:cxn>
+              <a:cxn ang="0">
+                <a:pos x="csX24" y="csY24"/>
+              </a:cxn>
+              <a:cxn ang="0">
+                <a:pos x="csX25" y="csY25"/>
+              </a:cxn>
+              <a:cxn ang="0">
+                <a:pos x="csX26" y="csY26"/>
+              </a:cxn>
+              <a:cxn ang="0">
+                <a:pos x="csX27" y="csY27"/>
+              </a:cxn>
+              <a:cxn ang="0">
+                <a:pos x="csX28" y="csY28"/>
+              </a:cxn>
+              <a:cxn ang="0">
+                <a:pos x="csX29" y="csY29"/>
+              </a:cxn>
+              <a:cxn ang="0">
+                <a:pos x="csX30" y="csY30"/>
+              </a:cxn>
+              <a:cxn ang="0">
+                <a:pos x="csX31" y="csY31"/>
+              </a:cxn>
+              <a:cxn ang="0">
+                <a:pos x="csX32" y="csY32"/>
+              </a:cxn>
+              <a:cxn ang="0">
+                <a:pos x="csX33" y="csY33"/>
+              </a:cxn>
+              <a:cxn ang="0">
+                <a:pos x="csX34" y="csY34"/>
+              </a:cxn>
+              <a:cxn ang="0">
+                <a:pos x="csX35" y="csY35"/>
+              </a:cxn>
+              <a:cxn ang="0">
+                <a:pos x="csX36" y="csY36"/>
+              </a:cxn>
+              <a:cxn ang="0">
+                <a:pos x="csX37" y="csY37"/>
+              </a:cxn>
+            </a:cxnLst>
+            <a:rect l="l" t="t" r="r" b="b"/>
+            <a:pathLst>
+              <a:path w="10972800" h="18288" fill="none" extrusionOk="0">
+                <a:moveTo>
+                  <a:pt x="0" y="0"/>
+                </a:moveTo>
+                <a:cubicBezTo>
+                  <a:pt x="165916" y="-1866"/>
+                  <a:pt x="188720" y="13756"/>
+                  <a:pt x="356616" y="0"/>
+                </a:cubicBezTo>
+                <a:cubicBezTo>
+                  <a:pt x="524512" y="-13756"/>
+                  <a:pt x="734781" y="8922"/>
+                  <a:pt x="1042416" y="0"/>
+                </a:cubicBezTo>
+                <a:cubicBezTo>
+                  <a:pt x="1350051" y="-8922"/>
+                  <a:pt x="1595982" y="-26315"/>
+                  <a:pt x="1947672" y="0"/>
+                </a:cubicBezTo>
+                <a:cubicBezTo>
+                  <a:pt x="2299362" y="26315"/>
+                  <a:pt x="2292691" y="-19526"/>
+                  <a:pt x="2633472" y="0"/>
+                </a:cubicBezTo>
+                <a:cubicBezTo>
+                  <a:pt x="2974253" y="19526"/>
+                  <a:pt x="2857309" y="10773"/>
+                  <a:pt x="2990088" y="0"/>
+                </a:cubicBezTo>
+                <a:cubicBezTo>
+                  <a:pt x="3122867" y="-10773"/>
+                  <a:pt x="3359343" y="7194"/>
+                  <a:pt x="3456432" y="0"/>
+                </a:cubicBezTo>
+                <a:cubicBezTo>
+                  <a:pt x="3553521" y="-7194"/>
+                  <a:pt x="4136258" y="5108"/>
+                  <a:pt x="4361688" y="0"/>
+                </a:cubicBezTo>
+                <a:cubicBezTo>
+                  <a:pt x="4587118" y="-5108"/>
+                  <a:pt x="4992424" y="-42958"/>
+                  <a:pt x="5266944" y="0"/>
+                </a:cubicBezTo>
+                <a:cubicBezTo>
+                  <a:pt x="5541464" y="42958"/>
+                  <a:pt x="5882966" y="-3430"/>
+                  <a:pt x="6172200" y="0"/>
+                </a:cubicBezTo>
+                <a:cubicBezTo>
+                  <a:pt x="6461434" y="3430"/>
+                  <a:pt x="6432127" y="6688"/>
+                  <a:pt x="6528816" y="0"/>
+                </a:cubicBezTo>
+                <a:cubicBezTo>
+                  <a:pt x="6625505" y="-6688"/>
+                  <a:pt x="6916805" y="-436"/>
+                  <a:pt x="7214616" y="0"/>
+                </a:cubicBezTo>
+                <a:cubicBezTo>
+                  <a:pt x="7512427" y="436"/>
+                  <a:pt x="7626159" y="-6909"/>
+                  <a:pt x="7790688" y="0"/>
+                </a:cubicBezTo>
+                <a:cubicBezTo>
+                  <a:pt x="7955217" y="6909"/>
+                  <a:pt x="8048891" y="15307"/>
+                  <a:pt x="8147304" y="0"/>
+                </a:cubicBezTo>
+                <a:cubicBezTo>
+                  <a:pt x="8245717" y="-15307"/>
+                  <a:pt x="8645618" y="-11734"/>
+                  <a:pt x="9052560" y="0"/>
+                </a:cubicBezTo>
+                <a:cubicBezTo>
+                  <a:pt x="9459502" y="11734"/>
+                  <a:pt x="9320584" y="8388"/>
+                  <a:pt x="9409176" y="0"/>
+                </a:cubicBezTo>
+                <a:cubicBezTo>
+                  <a:pt x="9497768" y="-8388"/>
+                  <a:pt x="9644192" y="8379"/>
+                  <a:pt x="9765792" y="0"/>
+                </a:cubicBezTo>
+                <a:cubicBezTo>
+                  <a:pt x="9887392" y="-8379"/>
+                  <a:pt x="10105220" y="-12663"/>
+                  <a:pt x="10341864" y="0"/>
+                </a:cubicBezTo>
+                <a:cubicBezTo>
+                  <a:pt x="10578508" y="12663"/>
+                  <a:pt x="10773103" y="-5786"/>
+                  <a:pt x="10972800" y="0"/>
+                </a:cubicBezTo>
+                <a:cubicBezTo>
+                  <a:pt x="10972146" y="8818"/>
+                  <a:pt x="10972240" y="13823"/>
+                  <a:pt x="10972800" y="18288"/>
+                </a:cubicBezTo>
+                <a:cubicBezTo>
+                  <a:pt x="10588778" y="31598"/>
+                  <a:pt x="10543381" y="-12698"/>
+                  <a:pt x="10177272" y="18288"/>
+                </a:cubicBezTo>
+                <a:cubicBezTo>
+                  <a:pt x="9811163" y="49274"/>
+                  <a:pt x="9996817" y="25662"/>
+                  <a:pt x="9820656" y="18288"/>
+                </a:cubicBezTo>
+                <a:cubicBezTo>
+                  <a:pt x="9644495" y="10914"/>
+                  <a:pt x="9607007" y="31631"/>
+                  <a:pt x="9464040" y="18288"/>
+                </a:cubicBezTo>
+                <a:cubicBezTo>
+                  <a:pt x="9321073" y="4945"/>
+                  <a:pt x="9114189" y="28940"/>
+                  <a:pt x="8778240" y="18288"/>
+                </a:cubicBezTo>
+                <a:cubicBezTo>
+                  <a:pt x="8442291" y="7636"/>
+                  <a:pt x="8594763" y="987"/>
+                  <a:pt x="8421624" y="18288"/>
+                </a:cubicBezTo>
+                <a:cubicBezTo>
+                  <a:pt x="8248485" y="35589"/>
+                  <a:pt x="7929515" y="37573"/>
+                  <a:pt x="7735824" y="18288"/>
+                </a:cubicBezTo>
+                <a:cubicBezTo>
+                  <a:pt x="7542133" y="-997"/>
+                  <a:pt x="7252504" y="33858"/>
+                  <a:pt x="6940296" y="18288"/>
+                </a:cubicBezTo>
+                <a:cubicBezTo>
+                  <a:pt x="6628088" y="2718"/>
+                  <a:pt x="6528503" y="48389"/>
+                  <a:pt x="6254496" y="18288"/>
+                </a:cubicBezTo>
+                <a:cubicBezTo>
+                  <a:pt x="5980489" y="-11813"/>
+                  <a:pt x="5695784" y="-3740"/>
+                  <a:pt x="5458968" y="18288"/>
+                </a:cubicBezTo>
+                <a:cubicBezTo>
+                  <a:pt x="5222152" y="40316"/>
+                  <a:pt x="5010751" y="19095"/>
+                  <a:pt x="4663440" y="18288"/>
+                </a:cubicBezTo>
+                <a:cubicBezTo>
+                  <a:pt x="4316129" y="17481"/>
+                  <a:pt x="4425552" y="1606"/>
+                  <a:pt x="4306824" y="18288"/>
+                </a:cubicBezTo>
+                <a:cubicBezTo>
+                  <a:pt x="4188096" y="34970"/>
+                  <a:pt x="3941535" y="7481"/>
+                  <a:pt x="3840480" y="18288"/>
+                </a:cubicBezTo>
+                <a:cubicBezTo>
+                  <a:pt x="3739425" y="29095"/>
+                  <a:pt x="3402388" y="17641"/>
+                  <a:pt x="3264408" y="18288"/>
+                </a:cubicBezTo>
+                <a:cubicBezTo>
+                  <a:pt x="3126428" y="18935"/>
+                  <a:pt x="2776779" y="9983"/>
+                  <a:pt x="2578608" y="18288"/>
+                </a:cubicBezTo>
+                <a:cubicBezTo>
+                  <a:pt x="2380437" y="26593"/>
+                  <a:pt x="1909468" y="25818"/>
+                  <a:pt x="1673352" y="18288"/>
+                </a:cubicBezTo>
+                <a:cubicBezTo>
+                  <a:pt x="1437236" y="10758"/>
+                  <a:pt x="1131180" y="49884"/>
+                  <a:pt x="877824" y="18288"/>
+                </a:cubicBezTo>
+                <a:cubicBezTo>
+                  <a:pt x="624468" y="-13308"/>
+                  <a:pt x="206753" y="2195"/>
+                  <a:pt x="0" y="18288"/>
+                </a:cubicBezTo>
+                <a:cubicBezTo>
+                  <a:pt x="313" y="10654"/>
+                  <a:pt x="-263" y="4056"/>
+                  <a:pt x="0" y="0"/>
+                </a:cubicBezTo>
+                <a:close/>
+              </a:path>
+              <a:path w="10972800" h="18288" stroke="0" extrusionOk="0">
+                <a:moveTo>
+                  <a:pt x="0" y="0"/>
+                </a:moveTo>
+                <a:cubicBezTo>
+                  <a:pt x="164017" y="-17675"/>
+                  <a:pt x="309425" y="9913"/>
+                  <a:pt x="466344" y="0"/>
+                </a:cubicBezTo>
+                <a:cubicBezTo>
+                  <a:pt x="623263" y="-9913"/>
+                  <a:pt x="659300" y="-14524"/>
+                  <a:pt x="822960" y="0"/>
+                </a:cubicBezTo>
+                <a:cubicBezTo>
+                  <a:pt x="986620" y="14524"/>
+                  <a:pt x="1105222" y="-16481"/>
+                  <a:pt x="1289304" y="0"/>
+                </a:cubicBezTo>
+                <a:cubicBezTo>
+                  <a:pt x="1473386" y="16481"/>
+                  <a:pt x="1693223" y="26161"/>
+                  <a:pt x="1975104" y="0"/>
+                </a:cubicBezTo>
+                <a:cubicBezTo>
+                  <a:pt x="2256985" y="-26161"/>
+                  <a:pt x="2435781" y="23061"/>
+                  <a:pt x="2770632" y="0"/>
+                </a:cubicBezTo>
+                <a:cubicBezTo>
+                  <a:pt x="3105483" y="-23061"/>
+                  <a:pt x="3247479" y="-44011"/>
+                  <a:pt x="3675888" y="0"/>
+                </a:cubicBezTo>
+                <a:cubicBezTo>
+                  <a:pt x="4104297" y="44011"/>
+                  <a:pt x="4280918" y="4017"/>
+                  <a:pt x="4581144" y="0"/>
+                </a:cubicBezTo>
+                <a:cubicBezTo>
+                  <a:pt x="4881370" y="-4017"/>
+                  <a:pt x="5021699" y="-11889"/>
+                  <a:pt x="5157216" y="0"/>
+                </a:cubicBezTo>
+                <a:cubicBezTo>
+                  <a:pt x="5292733" y="11889"/>
+                  <a:pt x="5603398" y="-17698"/>
+                  <a:pt x="5952744" y="0"/>
+                </a:cubicBezTo>
+                <a:cubicBezTo>
+                  <a:pt x="6302090" y="17698"/>
+                  <a:pt x="6353093" y="-11909"/>
+                  <a:pt x="6638544" y="0"/>
+                </a:cubicBezTo>
+                <a:cubicBezTo>
+                  <a:pt x="6923995" y="11909"/>
+                  <a:pt x="7053404" y="21630"/>
+                  <a:pt x="7214616" y="0"/>
+                </a:cubicBezTo>
+                <a:cubicBezTo>
+                  <a:pt x="7375828" y="-21630"/>
+                  <a:pt x="7837963" y="3886"/>
+                  <a:pt x="8010144" y="0"/>
+                </a:cubicBezTo>
+                <a:cubicBezTo>
+                  <a:pt x="8182325" y="-3886"/>
+                  <a:pt x="8224183" y="16009"/>
+                  <a:pt x="8366760" y="0"/>
+                </a:cubicBezTo>
+                <a:cubicBezTo>
+                  <a:pt x="8509337" y="-16009"/>
+                  <a:pt x="8687920" y="-5720"/>
+                  <a:pt x="8942832" y="0"/>
+                </a:cubicBezTo>
+                <a:cubicBezTo>
+                  <a:pt x="9197744" y="5720"/>
+                  <a:pt x="9368437" y="20479"/>
+                  <a:pt x="9628632" y="0"/>
+                </a:cubicBezTo>
+                <a:cubicBezTo>
+                  <a:pt x="9888827" y="-20479"/>
+                  <a:pt x="10560858" y="-20746"/>
+                  <a:pt x="10972800" y="0"/>
+                </a:cubicBezTo>
+                <a:cubicBezTo>
+                  <a:pt x="10972186" y="5722"/>
+                  <a:pt x="10972980" y="12495"/>
+                  <a:pt x="10972800" y="18288"/>
+                </a:cubicBezTo>
+                <a:cubicBezTo>
+                  <a:pt x="10786146" y="12536"/>
+                  <a:pt x="10623717" y="14033"/>
+                  <a:pt x="10506456" y="18288"/>
+                </a:cubicBezTo>
+                <a:cubicBezTo>
+                  <a:pt x="10389195" y="22543"/>
+                  <a:pt x="10296178" y="20107"/>
+                  <a:pt x="10149840" y="18288"/>
+                </a:cubicBezTo>
+                <a:cubicBezTo>
+                  <a:pt x="10003502" y="16469"/>
+                  <a:pt x="9767530" y="28891"/>
+                  <a:pt x="9464040" y="18288"/>
+                </a:cubicBezTo>
+                <a:cubicBezTo>
+                  <a:pt x="9160550" y="7685"/>
+                  <a:pt x="9229050" y="2659"/>
+                  <a:pt x="8997696" y="18288"/>
+                </a:cubicBezTo>
+                <a:cubicBezTo>
+                  <a:pt x="8766342" y="33917"/>
+                  <a:pt x="8340136" y="34864"/>
+                  <a:pt x="8092440" y="18288"/>
+                </a:cubicBezTo>
+                <a:cubicBezTo>
+                  <a:pt x="7844744" y="1712"/>
+                  <a:pt x="7863720" y="27405"/>
+                  <a:pt x="7735824" y="18288"/>
+                </a:cubicBezTo>
+                <a:cubicBezTo>
+                  <a:pt x="7607928" y="9171"/>
+                  <a:pt x="7323619" y="461"/>
+                  <a:pt x="7050024" y="18288"/>
+                </a:cubicBezTo>
+                <a:cubicBezTo>
+                  <a:pt x="6776429" y="36115"/>
+                  <a:pt x="6787899" y="28206"/>
+                  <a:pt x="6693408" y="18288"/>
+                </a:cubicBezTo>
+                <a:cubicBezTo>
+                  <a:pt x="6598917" y="8370"/>
+                  <a:pt x="6395231" y="19114"/>
+                  <a:pt x="6227064" y="18288"/>
+                </a:cubicBezTo>
+                <a:cubicBezTo>
+                  <a:pt x="6058897" y="17462"/>
+                  <a:pt x="5618582" y="1091"/>
+                  <a:pt x="5431536" y="18288"/>
+                </a:cubicBezTo>
+                <a:cubicBezTo>
+                  <a:pt x="5244490" y="35485"/>
+                  <a:pt x="4729797" y="-9650"/>
+                  <a:pt x="4526280" y="18288"/>
+                </a:cubicBezTo>
+                <a:cubicBezTo>
+                  <a:pt x="4322763" y="46226"/>
+                  <a:pt x="4216797" y="756"/>
+                  <a:pt x="4059936" y="18288"/>
+                </a:cubicBezTo>
+                <a:cubicBezTo>
+                  <a:pt x="3903075" y="35820"/>
+                  <a:pt x="3537912" y="42098"/>
+                  <a:pt x="3374136" y="18288"/>
+                </a:cubicBezTo>
+                <a:cubicBezTo>
+                  <a:pt x="3210360" y="-5522"/>
+                  <a:pt x="3126842" y="39135"/>
+                  <a:pt x="2907792" y="18288"/>
+                </a:cubicBezTo>
+                <a:cubicBezTo>
+                  <a:pt x="2688742" y="-2559"/>
+                  <a:pt x="2490436" y="34100"/>
+                  <a:pt x="2112264" y="18288"/>
+                </a:cubicBezTo>
+                <a:cubicBezTo>
+                  <a:pt x="1734092" y="2476"/>
+                  <a:pt x="1744622" y="-7274"/>
+                  <a:pt x="1536192" y="18288"/>
+                </a:cubicBezTo>
+                <a:cubicBezTo>
+                  <a:pt x="1327762" y="43850"/>
+                  <a:pt x="1189025" y="6435"/>
+                  <a:pt x="1069848" y="18288"/>
+                </a:cubicBezTo>
+                <a:cubicBezTo>
+                  <a:pt x="950671" y="30141"/>
+                  <a:pt x="858345" y="33684"/>
+                  <a:pt x="713232" y="18288"/>
+                </a:cubicBezTo>
+                <a:cubicBezTo>
+                  <a:pt x="568119" y="2892"/>
+                  <a:pt x="250292" y="5410"/>
+                  <a:pt x="0" y="18288"/>
+                </a:cubicBezTo>
+                <a:cubicBezTo>
+                  <a:pt x="465" y="13062"/>
+                  <a:pt x="-894" y="9029"/>
+                  <a:pt x="0" y="0"/>
+                </a:cubicBezTo>
+                <a:close/>
+              </a:path>
+            </a:pathLst>
+          </a:custGeom>
+          <a:solidFill>
+            <a:schemeClr val="accent2">
+              <a:alpha val="75000"/>
+            </a:schemeClr>
+          </a:solidFill>
+          <a:ln w="44450" cap="rnd">
+            <a:solidFill>
+              <a:schemeClr val="accent2">
+                <a:alpha val="75000"/>
+              </a:schemeClr>
+            </a:solidFill>
+            <a:round/>
+            <a:extLst>
+              <a:ext uri="{C807C97D-BFC1-408E-A445-0C87EB9F89A2}">
+                <ask:lineSketchStyleProps xmlns:ask="http://schemas.microsoft.com/office/drawing/2018/sketchyshapes" sd="2727557108">
+                  <a:prstGeom prst="rect">
+                    <a:avLst/>
+                  </a:prstGeom>
+                  <ask:type>
+                    <ask:lineSketchFreehand/>
+                  </ask:type>
+                </ask:lineSketchStyleProps>
+              </a:ext>
+            </a:extLst>
+          </a:ln>
+        </p:spPr>
+        <p:style>
+          <a:lnRef idx="2">
+            <a:schemeClr val="accent1">
+              <a:shade val="50000"/>
+            </a:schemeClr>
+          </a:lnRef>
+          <a:fillRef idx="1">
+            <a:schemeClr val="accent1"/>
+          </a:fillRef>
+          <a:effectRef idx="0">
+            <a:schemeClr val="accent1"/>
+          </a:effectRef>
+          <a:fontRef idx="minor">
+            <a:schemeClr val="lt1"/>
+          </a:fontRef>
+        </p:style>
+        <p:txBody>
+          <a:bodyPr rtlCol="0" anchor="ctr"/>
+          <a:lstStyle/>
+          <a:p>
+            <a:pPr algn="ctr"/>
+            <a:endParaRPr lang="en-US" noProof="0" dirty="0"/>
           </a:p>
         </p:txBody>
       </p:sp>
@@ -14064,7 +14960,7 @@
           <p:cNvPr id="18" name="Rounded Rectangle 13">
             <a:extLst>
               <a:ext uri="{FF2B5EF4-FFF2-40B4-BE49-F238E27FC236}">
-                <a16:creationId xmlns:a16="http://schemas.microsoft.com/office/drawing/2014/main" id="{6F017920-4368-FA8A-8A04-47E00ED51472}"/>
+                <a16:creationId xmlns:a16="http://schemas.microsoft.com/office/drawing/2014/main" id="{C810D793-AF25-F565-4182-28F9F09ECF3B}"/>
               </a:ext>
             </a:extLst>
           </p:cNvPr>
@@ -14073,8 +14969,8 @@
         </p:nvSpPr>
         <p:spPr>
           <a:xfrm>
-            <a:off x="644013" y="3888757"/>
-            <a:ext cx="10881360" cy="2631406"/>
+            <a:off x="644013" y="2043733"/>
+            <a:ext cx="10881360" cy="4476430"/>
           </a:xfrm>
           <a:prstGeom prst="roundRect">
             <a:avLst/>
@@ -14116,7 +15012,7 @@
           <p:cNvPr id="19" name="Rectangle 18">
             <a:extLst>
               <a:ext uri="{FF2B5EF4-FFF2-40B4-BE49-F238E27FC236}">
-                <a16:creationId xmlns:a16="http://schemas.microsoft.com/office/drawing/2014/main" id="{CBFF3B4E-0497-AF62-E526-AC79984A6A28}"/>
+                <a16:creationId xmlns:a16="http://schemas.microsoft.com/office/drawing/2014/main" id="{841B590E-EA60-3CCA-3DA4-A99B537A23A0}"/>
               </a:ext>
             </a:extLst>
           </p:cNvPr>
@@ -14125,8 +15021,8 @@
         </p:nvSpPr>
         <p:spPr>
           <a:xfrm>
-            <a:off x="644013" y="3888757"/>
-            <a:ext cx="164592" cy="2631406"/>
+            <a:off x="644013" y="2043733"/>
+            <a:ext cx="164592" cy="4476430"/>
           </a:xfrm>
           <a:prstGeom prst="rect">
             <a:avLst/>
@@ -14166,7 +15062,7 @@
           <p:cNvPr id="20" name="Oval 19">
             <a:extLst>
               <a:ext uri="{FF2B5EF4-FFF2-40B4-BE49-F238E27FC236}">
-                <a16:creationId xmlns:a16="http://schemas.microsoft.com/office/drawing/2014/main" id="{D92E8FF2-F61F-7833-A08C-C578DBA18269}"/>
+                <a16:creationId xmlns:a16="http://schemas.microsoft.com/office/drawing/2014/main" id="{B2030210-EA8A-1617-ED5F-AEE36401A9D9}"/>
               </a:ext>
             </a:extLst>
           </p:cNvPr>
@@ -14175,7 +15071,7 @@
         </p:nvSpPr>
         <p:spPr>
           <a:xfrm>
-            <a:off x="5828268" y="4245285"/>
+            <a:off x="5870841" y="3033181"/>
             <a:ext cx="512064" cy="512064"/>
           </a:xfrm>
           <a:prstGeom prst="ellipse">
@@ -14216,7 +15112,7 @@
           <p:cNvPr id="21" name="TextBox 20">
             <a:extLst>
               <a:ext uri="{FF2B5EF4-FFF2-40B4-BE49-F238E27FC236}">
-                <a16:creationId xmlns:a16="http://schemas.microsoft.com/office/drawing/2014/main" id="{A7E7A80B-64FC-151B-AEBA-3145067FBC88}"/>
+                <a16:creationId xmlns:a16="http://schemas.microsoft.com/office/drawing/2014/main" id="{97737E03-9773-511F-8391-203BF6EF7FA0}"/>
               </a:ext>
             </a:extLst>
           </p:cNvPr>
@@ -14225,7 +15121,7 @@
         </p:nvSpPr>
         <p:spPr>
           <a:xfrm>
-            <a:off x="5828268" y="4309293"/>
+            <a:off x="5870841" y="3097189"/>
             <a:ext cx="512064" cy="274320"/>
           </a:xfrm>
           <a:prstGeom prst="rect">
@@ -14256,7 +15152,7 @@
           <p:cNvPr id="22" name="TextBox 21">
             <a:extLst>
               <a:ext uri="{FF2B5EF4-FFF2-40B4-BE49-F238E27FC236}">
-                <a16:creationId xmlns:a16="http://schemas.microsoft.com/office/drawing/2014/main" id="{1BD81583-D6CC-AC31-D19F-6AD25048A2B0}"/>
+                <a16:creationId xmlns:a16="http://schemas.microsoft.com/office/drawing/2014/main" id="{863608D7-B304-7B23-381A-14C61F9CBC8F}"/>
               </a:ext>
             </a:extLst>
           </p:cNvPr>
@@ -14265,7 +15161,7 @@
         </p:nvSpPr>
         <p:spPr>
           <a:xfrm>
-            <a:off x="1232376" y="5113876"/>
+            <a:off x="1274949" y="3901772"/>
             <a:ext cx="9784080" cy="677108"/>
           </a:xfrm>
           <a:prstGeom prst="rect">
@@ -14312,7 +15208,7 @@
           <p:cNvPr id="4102" name="Picture 6" descr="Question mark - Free shapes and symbols icons">
             <a:extLst>
               <a:ext uri="{FF2B5EF4-FFF2-40B4-BE49-F238E27FC236}">
-                <a16:creationId xmlns:a16="http://schemas.microsoft.com/office/drawing/2014/main" id="{C52E5D00-2E56-E1E6-2B55-C07DF989D7F0}"/>
+                <a16:creationId xmlns:a16="http://schemas.microsoft.com/office/drawing/2014/main" id="{08DCDBA7-7B21-DC43-35F2-1BA2D1B02002}"/>
               </a:ext>
             </a:extLst>
           </p:cNvPr>
@@ -14359,7 +15255,7 @@
           <p:cNvPr id="23" name="Picture 6" descr="Question mark - Free shapes and symbols icons">
             <a:extLst>
               <a:ext uri="{FF2B5EF4-FFF2-40B4-BE49-F238E27FC236}">
-                <a16:creationId xmlns:a16="http://schemas.microsoft.com/office/drawing/2014/main" id="{77D4641A-729F-E958-B619-3AD1B7B31220}"/>
+                <a16:creationId xmlns:a16="http://schemas.microsoft.com/office/drawing/2014/main" id="{2903EBBF-7F1F-50C8-5D30-8FCDF4F6D666}"/>
               </a:ext>
             </a:extLst>
           </p:cNvPr>
@@ -14406,7 +15302,7 @@
           <p:cNvPr id="29" name="Picture 6" descr="Question mark - Free shapes and symbols icons">
             <a:extLst>
               <a:ext uri="{FF2B5EF4-FFF2-40B4-BE49-F238E27FC236}">
-                <a16:creationId xmlns:a16="http://schemas.microsoft.com/office/drawing/2014/main" id="{E2BB7C7E-B4FE-0D67-C093-0A7EBF4EFA6D}"/>
+                <a16:creationId xmlns:a16="http://schemas.microsoft.com/office/drawing/2014/main" id="{5DD8E29B-3F90-A183-C143-11AD3932C9DA}"/>
               </a:ext>
             </a:extLst>
           </p:cNvPr>
@@ -14453,7 +15349,7 @@
           <p:cNvPr id="30" name="Picture 6" descr="Question mark - Free shapes and symbols icons">
             <a:extLst>
               <a:ext uri="{FF2B5EF4-FFF2-40B4-BE49-F238E27FC236}">
-                <a16:creationId xmlns:a16="http://schemas.microsoft.com/office/drawing/2014/main" id="{C7F25AED-0652-7493-FF88-905884A40F7D}"/>
+                <a16:creationId xmlns:a16="http://schemas.microsoft.com/office/drawing/2014/main" id="{23EA3A54-28BD-8540-F2CD-52184D6E87DC}"/>
               </a:ext>
             </a:extLst>
           </p:cNvPr>
@@ -14498,7 +15394,7 @@
     </p:spTree>
     <p:extLst>
       <p:ext uri="{BB962C8B-B14F-4D97-AF65-F5344CB8AC3E}">
-        <p14:creationId xmlns:p14="http://schemas.microsoft.com/office/powerpoint/2010/main" val="1798603094"/>
+        <p14:creationId xmlns:p14="http://schemas.microsoft.com/office/powerpoint/2010/main" val="4252053357"/>
       </p:ext>
     </p:extLst>
   </p:cSld>

--- a/Documentation/mindmap_visual_presentation.pptx
+++ b/Documentation/mindmap_visual_presentation.pptx
@@ -7663,36 +7663,6 @@
           </a:p>
         </p:txBody>
       </p:sp>
-      <p:pic>
-        <p:nvPicPr>
-          <p:cNvPr id="4" name="Picture 3">
-            <a:extLst>
-              <a:ext uri="{FF2B5EF4-FFF2-40B4-BE49-F238E27FC236}">
-                <a16:creationId xmlns:a16="http://schemas.microsoft.com/office/drawing/2014/main" id="{7463FBBC-5530-A1C3-4971-12A97C38E876}"/>
-              </a:ext>
-            </a:extLst>
-          </p:cNvPr>
-          <p:cNvPicPr>
-            <a:picLocks noChangeAspect="1"/>
-          </p:cNvPicPr>
-          <p:nvPr/>
-        </p:nvPicPr>
-        <p:blipFill>
-          <a:blip r:embed="rId2"/>
-          <a:stretch>
-            <a:fillRect/>
-          </a:stretch>
-        </p:blipFill>
-        <p:spPr>
-          <a:xfrm>
-            <a:off x="5594073" y="2003062"/>
-            <a:ext cx="5996940" cy="3997960"/>
-          </a:xfrm>
-          <a:prstGeom prst="rect">
-            <a:avLst/>
-          </a:prstGeom>
-        </p:spPr>
-      </p:pic>
       <p:sp>
         <p:nvSpPr>
           <p:cNvPr id="5" name="Rounded Rectangle 3">
@@ -8116,6 +8086,36 @@
           </a:p>
         </p:txBody>
       </p:sp>
+      <p:pic>
+        <p:nvPicPr>
+          <p:cNvPr id="10" name="Picture 9">
+            <a:extLst>
+              <a:ext uri="{FF2B5EF4-FFF2-40B4-BE49-F238E27FC236}">
+                <a16:creationId xmlns:a16="http://schemas.microsoft.com/office/drawing/2014/main" id="{58ED5BE1-4279-904D-E679-DB200E16743B}"/>
+              </a:ext>
+            </a:extLst>
+          </p:cNvPr>
+          <p:cNvPicPr>
+            <a:picLocks noChangeAspect="1"/>
+          </p:cNvPicPr>
+          <p:nvPr/>
+        </p:nvPicPr>
+        <p:blipFill>
+          <a:blip r:embed="rId2"/>
+          <a:stretch>
+            <a:fillRect/>
+          </a:stretch>
+        </p:blipFill>
+        <p:spPr>
+          <a:xfrm>
+            <a:off x="5151582" y="1859280"/>
+            <a:ext cx="6333203" cy="4222135"/>
+          </a:xfrm>
+          <a:prstGeom prst="rect">
+            <a:avLst/>
+          </a:prstGeom>
+        </p:spPr>
+      </p:pic>
     </p:spTree>
     <p:extLst>
       <p:ext uri="{BB962C8B-B14F-4D97-AF65-F5344CB8AC3E}">
@@ -14062,10 +14062,40 @@
       </p:sp>
       <p:pic>
         <p:nvPicPr>
-          <p:cNvPr id="1026" name="Picture 2">
+          <p:cNvPr id="12" name="Picture 11">
             <a:extLst>
               <a:ext uri="{FF2B5EF4-FFF2-40B4-BE49-F238E27FC236}">
-                <a16:creationId xmlns:a16="http://schemas.microsoft.com/office/drawing/2014/main" id="{1A0390AF-D90D-A6E6-D599-24828C2B5AA3}"/>
+                <a16:creationId xmlns:a16="http://schemas.microsoft.com/office/drawing/2014/main" id="{D4E89FAE-BD0D-BA58-5C21-E512F5ABE050}"/>
+              </a:ext>
+            </a:extLst>
+          </p:cNvPr>
+          <p:cNvPicPr>
+            <a:picLocks noChangeAspect="1"/>
+          </p:cNvPicPr>
+          <p:nvPr/>
+        </p:nvPicPr>
+        <p:blipFill>
+          <a:blip r:embed="rId2"/>
+          <a:stretch>
+            <a:fillRect/>
+          </a:stretch>
+        </p:blipFill>
+        <p:spPr>
+          <a:xfrm>
+            <a:off x="7139890" y="1754935"/>
+            <a:ext cx="3300295" cy="2475221"/>
+          </a:xfrm>
+          <a:prstGeom prst="rect">
+            <a:avLst/>
+          </a:prstGeom>
+        </p:spPr>
+      </p:pic>
+      <p:pic>
+        <p:nvPicPr>
+          <p:cNvPr id="13" name="Picture 2">
+            <a:extLst>
+              <a:ext uri="{FF2B5EF4-FFF2-40B4-BE49-F238E27FC236}">
+                <a16:creationId xmlns:a16="http://schemas.microsoft.com/office/drawing/2014/main" id="{03C177BD-D47D-D010-26E1-4C0B54BBCD12}"/>
               </a:ext>
             </a:extLst>
           </p:cNvPr>
@@ -14075,7 +14105,7 @@
           <p:nvPr/>
         </p:nvPicPr>
         <p:blipFill>
-          <a:blip r:embed="rId2">
+          <a:blip r:embed="rId3">
             <a:extLst>
               <a:ext uri="{28A0092B-C50C-407E-A947-70E740481C1C}">
                 <a14:useLocalDpi xmlns:a14="http://schemas.microsoft.com/office/drawing/2010/main" val="0"/>
@@ -14089,55 +14119,8 @@
         </p:blipFill>
         <p:spPr bwMode="auto">
           <a:xfrm>
-            <a:off x="7295535" y="4198373"/>
-            <a:ext cx="3228116" cy="2421087"/>
-          </a:xfrm>
-          <a:prstGeom prst="rect">
-            <a:avLst/>
-          </a:prstGeom>
-          <a:noFill/>
-          <a:extLst>
-            <a:ext uri="{909E8E84-426E-40DD-AFC4-6F175D3DCCD1}">
-              <a14:hiddenFill xmlns:a14="http://schemas.microsoft.com/office/drawing/2010/main">
-                <a:solidFill>
-                  <a:srgbClr val="FFFFFF"/>
-                </a:solidFill>
-              </a14:hiddenFill>
-            </a:ext>
-          </a:extLst>
-        </p:spPr>
-      </p:pic>
-      <p:pic>
-        <p:nvPicPr>
-          <p:cNvPr id="1028" name="Picture 4">
-            <a:extLst>
-              <a:ext uri="{FF2B5EF4-FFF2-40B4-BE49-F238E27FC236}">
-                <a16:creationId xmlns:a16="http://schemas.microsoft.com/office/drawing/2014/main" id="{51D8B266-E104-3110-316A-CA9BD3CDC03E}"/>
-              </a:ext>
-            </a:extLst>
-          </p:cNvPr>
-          <p:cNvPicPr>
-            <a:picLocks noChangeAspect="1" noChangeArrowheads="1"/>
-          </p:cNvPicPr>
-          <p:nvPr/>
-        </p:nvPicPr>
-        <p:blipFill>
-          <a:blip r:embed="rId2">
-            <a:extLst>
-              <a:ext uri="{28A0092B-C50C-407E-A947-70E740481C1C}">
-                <a14:useLocalDpi xmlns:a14="http://schemas.microsoft.com/office/drawing/2010/main" val="0"/>
-              </a:ext>
-            </a:extLst>
-          </a:blip>
-          <a:srcRect/>
-          <a:stretch>
-            <a:fillRect/>
-          </a:stretch>
-        </p:blipFill>
-        <p:spPr bwMode="auto">
-          <a:xfrm>
-            <a:off x="7295533" y="1857828"/>
-            <a:ext cx="3228118" cy="2421088"/>
+            <a:off x="7139891" y="4093111"/>
+            <a:ext cx="3300295" cy="2475221"/>
           </a:xfrm>
           <a:prstGeom prst="rect">
             <a:avLst/>

--- a/Documentation/mindmap_visual_presentation.pptx
+++ b/Documentation/mindmap_visual_presentation.pptx
@@ -3291,7 +3291,7 @@
             </a:pPr>
             <a:r>
               <a:rPr lang="en-US" sz="3200" b="1" noProof="0" dirty="0"/>
-              <a:t>Mind Map</a:t>
+              <a:t>Mind Flow</a:t>
             </a:r>
           </a:p>
           <a:p>
@@ -4758,7 +4758,7 @@
             </a:pPr>
             <a:r>
               <a:rPr lang="en-US" noProof="0" dirty="0"/>
-              <a:t>Manual mind map evaluation is slow, subjective, and hard to scale.</a:t>
+              <a:t>Manual mind flow evaluation is slow, subjective, and hard to scale.</a:t>
             </a:r>
           </a:p>
         </p:txBody>
